--- a/public/fun/pack/pptx/familypro/가족소개프리미엄_09_나혼자·1인가구_로제브론즈.pptx
+++ b/public/fun/pack/pptx/familypro/가족소개프리미엄_09_나혼자·1인가구_로제브론즈.pptx
@@ -113,12 +113,12 @@
   <p:extLst>
     <p:ext uri="{521415D9-36F7-43E2-AB2F-B90AF26B5E84}">
       <p14:sectionLst xmlns:p14="http://schemas.microsoft.com/office/powerpoint/2010/main">
-        <p14:section name="시작" id="{09A96513-F4E2-4366-B01C-A820267B6AC1}">
+        <p14:section name="시작" id="{713B5B9B-0286-477B-8685-8A8061D50E31}">
           <p14:sldIdLst>
             <p14:sldId id="256"/>
           </p14:sldIdLst>
         </p14:section>
-        <p14:section name="본문" id="{958DFF57-E041-4DC0-A676-E36FB02CCD7D}">
+        <p14:section name="본문" id="{B8AEB23E-5A3E-4757-9E08-FC418DA12244}">
           <p14:sldIdLst>
             <p14:sldId id="257"/>
             <p14:sldId id="258"/>
@@ -127,7 +127,7 @@
             <p14:sldId id="261"/>
           </p14:sldIdLst>
         </p14:section>
-        <p14:section name="마무리" id="{7D22ABCE-5F2A-44F0-922D-0B1A28870C95}">
+        <p14:section name="마무리" id="{E5C18476-259E-4EC8-B9DE-1D90322C07E6}">
           <p14:sldIdLst>
             <p14:sldId id="262"/>
           </p14:sldIdLst>
@@ -1575,7 +1575,7 @@
             </a:lvl1pPr>
           </a:lstStyle>
           <a:p>
-            <a:fld id="{6737D5BB-105C-488D-993E-A935577815B1}" type="slidenum">
+            <a:fld id="{D61E9B14-9DC7-41F1-AA5D-1A0438A09658}" type="slidenum">
               <a:rPr lang="en-US"/>
               <a:t>‹#›</a:t>
             </a:fld>
@@ -2360,7 +2360,7 @@
             </a:lvl1pPr>
           </a:lstStyle>
           <a:p>
-            <a:fld id="{DA2068BD-92C9-49EC-A798-A8DBE88E4177}" type="slidenum">
+            <a:fld id="{92D9C2ED-76A7-4411-B319-4A842A7C4322}" type="slidenum">
               <a:rPr lang="en-US"/>
               <a:t>‹#›</a:t>
             </a:fld>
@@ -3113,7 +3113,7 @@
             </a:lvl1pPr>
           </a:lstStyle>
           <a:p>
-            <a:fld id="{500B2DDD-9F1F-421E-85D5-BC573D17D38C}" type="slidenum">
+            <a:fld id="{7CD11A71-CCB3-47F9-B13E-F5AD0E257C58}" type="slidenum">
               <a:rPr lang="en-US"/>
               <a:t>‹#›</a:t>
             </a:fld>
@@ -4090,7 +4090,7 @@
           <a:p>
             <a:r>
               <a:rPr lang="ko-KR"/>
-              <a:t>나 혼자 · 1인 가구 · 0000. 00. 00</a:t>
+              <a:t>나 혼자 · 1인 가구 · 날짜 입력</a:t>
             </a:r>
           </a:p>
         </p:txBody>
@@ -4400,7 +4400,7 @@
           <a:bodyPr/>
           <a:lstStyle/>
           <a:p>
-            <a:fld id="{E678EE45-FE82-4CB1-BB9B-6EC166887CAF}" type="slidenum">
+            <a:fld id="{844A1D8D-875C-451F-947E-08BA22D90902}" type="slidenum">
               <a:rPr lang="en-US"/>
               <a:t>‹#›</a:t>
             </a:fld>
@@ -5040,7 +5040,7 @@
           <a:bodyPr/>
           <a:lstStyle/>
           <a:p>
-            <a:fld id="{EC1225DD-2672-41FB-AEEA-0EAB9E373F3E}" type="slidenum">
+            <a:fld id="{158FF1DF-6322-4826-80A4-88DB405A33FB}" type="slidenum">
               <a:rPr lang="en-US"/>
               <a:t>‹#›</a:t>
             </a:fld>
@@ -5882,7 +5882,7 @@
           <a:bodyPr/>
           <a:lstStyle/>
           <a:p>
-            <a:fld id="{651172D4-CCBD-4E03-815A-5C1A7B0D65E1}" type="slidenum">
+            <a:fld id="{DA605AD6-98D6-4A8B-94BF-1A822335DFAF}" type="slidenum">
               <a:rPr lang="en-US"/>
               <a:t>‹#›</a:t>
             </a:fld>
@@ -7212,7 +7212,7 @@
           <a:bodyPr/>
           <a:lstStyle/>
           <a:p>
-            <a:fld id="{37AC3481-9829-4DD3-8A48-4E1705143A8F}" type="slidenum">
+            <a:fld id="{C30751B7-5EEE-4D5C-B94F-9FA23A2D3101}" type="slidenum">
               <a:rPr lang="en-US"/>
               <a:t>‹#›</a:t>
             </a:fld>
@@ -7300,7 +7300,7 @@
           <a:bodyPr/>
           <a:lstStyle/>
           <a:p>
-            <a:fld id="{9A6EB05A-473F-4E29-B6B6-9784F8AB2A99}" type="slidenum">
+            <a:fld id="{A8B18173-48AD-4675-A44A-F2E5906BFF85}" type="slidenum">
               <a:rPr lang="en-US"/>
               <a:t>‹#›</a:t>
             </a:fld>
